--- a/classes/parte-4-seguridad-de-aplicaciones-web/113-ataques-del-lado-del-cliente-cors-postmessage-y-prototype-pollution/clase-113-presentacion.pptx
+++ b/classes/parte-4-seguridad-de-aplicaciones-web/113-ataques-del-lado-del-cliente-cors-postmessage-y-prototype-pollution/clase-113-presentacion.pptx
@@ -17,6 +17,9 @@
     <p:sldId id="265" r:id="rId16"/>
     <p:sldId id="266" r:id="rId17"/>
     <p:sldId id="267" r:id="rId18"/>
+    <p:sldId id="268" r:id="rId19"/>
+    <p:sldId id="269" r:id="rId20"/>
+    <p:sldId id="270" r:id="rId21"/>
   </p:sldIdLst>
   <p:sldSz cx="9144000" cy="6858000" type="screen4x3"/>
   <p:notesSz cx="6858000" cy="9144000"/>
@@ -3198,7 +3201,7 @@
                   <a:srgbClr val="0B3D2E"/>
                 </a:solidFill>
               </a:rPr>
-              <a:t>⚠️ Errores comunes</a:t>
+              <a:t>✍️ Ejercicios</a:t>
             </a:r>
           </a:p>
         </p:txBody>
@@ -3236,67 +3239,82 @@
                   <a:srgbClr val="22282E"/>
                 </a:solidFill>
               </a:rPr>
-              <a:t>•  CORS no refleja Origin — Allowlist estricta; no explotable por reflejo</a:t>
-            </a:r>
-          </a:p>
-          <a:p>
-            <a:pPr>
-              <a:spcAft>
-                <a:spcPts val="600"/>
-              </a:spcAft>
-            </a:pPr>
-            <a:r>
-              <a:rPr sz="1500">
-                <a:solidFill>
-                  <a:srgbClr val="22282E"/>
-                </a:solidFill>
-              </a:rPr>
-              <a:t>•  Allow-Credentials ausente — Sin credenciales no hay fuga de datos privados</a:t>
-            </a:r>
-          </a:p>
-          <a:p>
-            <a:pPr>
-              <a:spcAft>
-                <a:spcPts val="600"/>
-              </a:spcAft>
-            </a:pPr>
-            <a:r>
-              <a:rPr sz="1500">
-                <a:solidFill>
-                  <a:srgbClr val="22282E"/>
-                </a:solidFill>
-              </a:rPr>
-              <a:t>•  postMessage valida origen — Handler seguro; documenta la fortaleza</a:t>
-            </a:r>
-          </a:p>
-          <a:p>
-            <a:pPr>
-              <a:spcAft>
-                <a:spcPts val="600"/>
-              </a:spcAft>
-            </a:pPr>
-            <a:r>
-              <a:rPr sz="1500">
-                <a:solidFill>
-                  <a:srgbClr val="22282E"/>
-                </a:solidFill>
-              </a:rPr>
-              <a:t>•  proto filtrado — La app sanea claves; prueba constructor.prototype</a:t>
-            </a:r>
-          </a:p>
-          <a:p>
-            <a:pPr>
-              <a:spcAft>
-                <a:spcPts val="600"/>
-              </a:spcAft>
-            </a:pPr>
-            <a:r>
-              <a:rPr sz="1500">
-                <a:solidFill>
-                  <a:srgbClr val="22282E"/>
-                </a:solidFill>
-              </a:rPr>
-              <a:t>•  Contaminación sin gadget — No hay sink que la consuma; busca otro</a:t>
+              <a:t>•  Explota un CORS que refleja el Origin y roba datos autenticados en el lab.</a:t>
+            </a:r>
+          </a:p>
+          <a:p>
+            <a:pPr>
+              <a:spcAft>
+                <a:spcPts val="600"/>
+              </a:spcAft>
+            </a:pPr>
+            <a:r>
+              <a:rPr sz="1500">
+                <a:solidFill>
+                  <a:srgbClr val="22282E"/>
+                </a:solidFill>
+              </a:rPr>
+              <a:t>•  Encuentra un postMessage sin validación de origen y explótalo.</a:t>
+            </a:r>
+          </a:p>
+          <a:p>
+            <a:pPr>
+              <a:spcAft>
+                <a:spcPts val="600"/>
+              </a:spcAft>
+            </a:pPr>
+            <a:r>
+              <a:rPr sz="1500">
+                <a:solidFill>
+                  <a:srgbClr val="22282E"/>
+                </a:solidFill>
+              </a:rPr>
+              <a:t>•  Contamina Object.prototype desde un parámetro y comprueba el efecto global.</a:t>
+            </a:r>
+          </a:p>
+          <a:p>
+            <a:pPr>
+              <a:spcAft>
+                <a:spcPts val="600"/>
+              </a:spcAft>
+            </a:pPr>
+            <a:r>
+              <a:rPr sz="1500">
+                <a:solidFill>
+                  <a:srgbClr val="22282E"/>
+                </a:solidFill>
+              </a:rPr>
+              <a:t>•  Localiza un gadget que convierta la contaminación en XSS.</a:t>
+            </a:r>
+          </a:p>
+          <a:p>
+            <a:pPr>
+              <a:spcAft>
+                <a:spcPts val="600"/>
+              </a:spcAft>
+            </a:pPr>
+            <a:r>
+              <a:rPr sz="1500">
+                <a:solidFill>
+                  <a:srgbClr val="22282E"/>
+                </a:solidFill>
+              </a:rPr>
+              <a:t>•  Explica el riesgo de prototype pollution en Node (RCE) frente al cliente (XSS).</a:t>
+            </a:r>
+          </a:p>
+          <a:p>
+            <a:pPr>
+              <a:spcAft>
+                <a:spcPts val="600"/>
+              </a:spcAft>
+            </a:pPr>
+            <a:r>
+              <a:rPr sz="1500">
+                <a:solidFill>
+                  <a:srgbClr val="22282E"/>
+                </a:solidFill>
+              </a:rPr>
+              <a:t>•  Propón defensas: allowlist de orígenes, validar event.origin, Object.freeze(Object.prototype).</a:t>
             </a:r>
           </a:p>
         </p:txBody>
@@ -3347,7 +3365,7 @@
                   <a:srgbClr val="0B3D2E"/>
                 </a:solidFill>
               </a:rPr>
-              <a:t>❓ Preguntas frecuentes</a:t>
+              <a:t>📝 Reto verificable</a:t>
             </a:r>
           </a:p>
         </p:txBody>
@@ -3385,82 +3403,22 @@
                   <a:srgbClr val="22282E"/>
                 </a:solidFill>
               </a:rPr>
-              <a:t>•  ❓ ¿CORS mal configurado es como CSRF?</a:t>
-            </a:r>
-          </a:p>
-          <a:p>
-            <a:pPr>
-              <a:spcAft>
-                <a:spcPts val="600"/>
-              </a:spcAft>
-            </a:pPr>
-            <a:r>
-              <a:rPr sz="1500">
-                <a:solidFill>
-                  <a:srgbClr val="22282E"/>
-                </a:solidFill>
-              </a:rPr>
-              <a:t>•  No: CSRF ejecuta acciones; el CORS inseguro permite leer respuestas cross-origin, filtrando datos.</a:t>
-            </a:r>
-          </a:p>
-          <a:p>
-            <a:pPr>
-              <a:spcAft>
-                <a:spcPts val="600"/>
-              </a:spcAft>
-            </a:pPr>
-            <a:r>
-              <a:rPr sz="1500">
-                <a:solidFill>
-                  <a:srgbClr val="22282E"/>
-                </a:solidFill>
-              </a:rPr>
-              <a:t>•  ❓ ¿Prototype pollution siempre es explotable?</a:t>
-            </a:r>
-          </a:p>
-          <a:p>
-            <a:pPr>
-              <a:spcAft>
-                <a:spcPts val="600"/>
-              </a:spcAft>
-            </a:pPr>
-            <a:r>
-              <a:rPr sz="1500">
-                <a:solidFill>
-                  <a:srgbClr val="22282E"/>
-                </a:solidFill>
-              </a:rPr>
-              <a:t>•  No por sí sola; necesita un gadget que lea la propiedad contaminada. Sin gadget, es un fallo latente.</a:t>
-            </a:r>
-          </a:p>
-          <a:p>
-            <a:pPr>
-              <a:spcAft>
-                <a:spcPts val="600"/>
-              </a:spcAft>
-            </a:pPr>
-            <a:r>
-              <a:rPr sz="1500">
-                <a:solidFill>
-                  <a:srgbClr val="22282E"/>
-                </a:solidFill>
-              </a:rPr>
-              <a:t>•  ❓ ¿Por qué validar event.origin en postMessage?</a:t>
-            </a:r>
-          </a:p>
-          <a:p>
-            <a:pPr>
-              <a:spcAft>
-                <a:spcPts val="600"/>
-              </a:spcAft>
-            </a:pPr>
-            <a:r>
-              <a:rPr sz="1500">
-                <a:solidFill>
-                  <a:srgbClr val="22282E"/>
-                </a:solidFill>
-              </a:rPr>
-              <a:t>•  Porque sin ello cualquier página puede enviar mensajes maliciosos que tu handler procesa como confiables.</a:t>
+              <a:t>•  Resuelve un lab de CORS que permita exfiltrar datos autenticados y un lab de prototype pollution que escale a XSS, documentando ambos.</a:t>
+            </a:r>
+          </a:p>
+          <a:p>
+            <a:pPr>
+              <a:spcAft>
+                <a:spcPts val="600"/>
+              </a:spcAft>
+            </a:pPr>
+            <a:r>
+              <a:rPr sz="1500">
+                <a:solidFill>
+                  <a:srgbClr val="22282E"/>
+                </a:solidFill>
+              </a:rPr>
+              <a:t>•  Criterio de aceptación: ambos labs quedan resueltos, entregas el exploit CORS (con credentials), el source→gadget de la contaminación y las defensas concretas por vector.</a:t>
             </a:r>
           </a:p>
         </p:txBody>
@@ -3511,7 +3469,7 @@
                   <a:srgbClr val="0B3D2E"/>
                 </a:solidFill>
               </a:rPr>
-              <a:t>🔗 Referencias</a:t>
+              <a:t>⚠️ Errores comunes</a:t>
             </a:r>
           </a:p>
         </p:txBody>
@@ -3549,6 +3507,319 @@
                   <a:srgbClr val="22282E"/>
                 </a:solidFill>
               </a:rPr>
+              <a:t>•  CORS no refleja Origin — Allowlist estricta; no explotable por reflejo</a:t>
+            </a:r>
+          </a:p>
+          <a:p>
+            <a:pPr>
+              <a:spcAft>
+                <a:spcPts val="600"/>
+              </a:spcAft>
+            </a:pPr>
+            <a:r>
+              <a:rPr sz="1500">
+                <a:solidFill>
+                  <a:srgbClr val="22282E"/>
+                </a:solidFill>
+              </a:rPr>
+              <a:t>•  Allow-Credentials ausente — Sin credenciales no hay fuga de datos privados</a:t>
+            </a:r>
+          </a:p>
+          <a:p>
+            <a:pPr>
+              <a:spcAft>
+                <a:spcPts val="600"/>
+              </a:spcAft>
+            </a:pPr>
+            <a:r>
+              <a:rPr sz="1500">
+                <a:solidFill>
+                  <a:srgbClr val="22282E"/>
+                </a:solidFill>
+              </a:rPr>
+              <a:t>•  postMessage valida origen — Handler seguro; documenta la fortaleza</a:t>
+            </a:r>
+          </a:p>
+          <a:p>
+            <a:pPr>
+              <a:spcAft>
+                <a:spcPts val="600"/>
+              </a:spcAft>
+            </a:pPr>
+            <a:r>
+              <a:rPr sz="1500">
+                <a:solidFill>
+                  <a:srgbClr val="22282E"/>
+                </a:solidFill>
+              </a:rPr>
+              <a:t>•  proto filtrado — La app sanea claves; prueba constructor.prototype</a:t>
+            </a:r>
+          </a:p>
+          <a:p>
+            <a:pPr>
+              <a:spcAft>
+                <a:spcPts val="600"/>
+              </a:spcAft>
+            </a:pPr>
+            <a:r>
+              <a:rPr sz="1500">
+                <a:solidFill>
+                  <a:srgbClr val="22282E"/>
+                </a:solidFill>
+              </a:rPr>
+              <a:t>•  Contaminación sin gadget — No hay sink que la consuma; busca otro</a:t>
+            </a:r>
+          </a:p>
+        </p:txBody>
+      </p:sp>
+    </p:spTree>
+  </p:cSld>
+  <p:clrMapOvr>
+    <a:masterClrMapping/>
+  </p:clrMapOvr>
+</p:sld>
+</file>
+
+<file path=ppt/slides/slide13.xml><?xml version="1.0" encoding="utf-8"?>
+<p:sld xmlns:a="http://schemas.openxmlformats.org/drawingml/2006/main" xmlns:p="http://schemas.openxmlformats.org/presentationml/2006/main" xmlns:r="http://schemas.openxmlformats.org/officeDocument/2006/relationships">
+  <p:cSld>
+    <p:spTree>
+      <p:nvGrpSpPr>
+        <p:cNvPr id="1" name=""/>
+        <p:cNvGrpSpPr/>
+        <p:nvPr/>
+      </p:nvGrpSpPr>
+      <p:grpSpPr/>
+      <p:sp>
+        <p:nvSpPr>
+          <p:cNvPr id="2" name="TextBox 1"/>
+          <p:cNvSpPr txBox="1"/>
+          <p:nvPr/>
+        </p:nvSpPr>
+        <p:spPr>
+          <a:xfrm>
+            <a:off x="457200" y="320040"/>
+            <a:ext cx="8229600" cy="822960"/>
+          </a:xfrm>
+          <a:prstGeom prst="rect">
+            <a:avLst/>
+          </a:prstGeom>
+          <a:noFill/>
+        </p:spPr>
+        <p:txBody>
+          <a:bodyPr wrap="square">
+            <a:spAutoFit/>
+          </a:bodyPr>
+          <a:lstStyle/>
+          <a:p>
+            <a:r>
+              <a:rPr sz="2600" b="1">
+                <a:solidFill>
+                  <a:srgbClr val="0B3D2E"/>
+                </a:solidFill>
+              </a:rPr>
+              <a:t>❓ Preguntas frecuentes</a:t>
+            </a:r>
+          </a:p>
+        </p:txBody>
+      </p:sp>
+      <p:sp>
+        <p:nvSpPr>
+          <p:cNvPr id="3" name="TextBox 2"/>
+          <p:cNvSpPr txBox="1"/>
+          <p:nvPr/>
+        </p:nvSpPr>
+        <p:spPr>
+          <a:xfrm>
+            <a:off x="457200" y="1280160"/>
+            <a:ext cx="8229600" cy="4937760"/>
+          </a:xfrm>
+          <a:prstGeom prst="rect">
+            <a:avLst/>
+          </a:prstGeom>
+          <a:noFill/>
+        </p:spPr>
+        <p:txBody>
+          <a:bodyPr wrap="square">
+            <a:spAutoFit/>
+          </a:bodyPr>
+          <a:lstStyle/>
+          <a:p>
+            <a:pPr>
+              <a:spcAft>
+                <a:spcPts val="600"/>
+              </a:spcAft>
+            </a:pPr>
+            <a:r>
+              <a:rPr sz="1500">
+                <a:solidFill>
+                  <a:srgbClr val="22282E"/>
+                </a:solidFill>
+              </a:rPr>
+              <a:t>•  ❓ ¿CORS mal configurado es como CSRF?</a:t>
+            </a:r>
+          </a:p>
+          <a:p>
+            <a:pPr>
+              <a:spcAft>
+                <a:spcPts val="600"/>
+              </a:spcAft>
+            </a:pPr>
+            <a:r>
+              <a:rPr sz="1500">
+                <a:solidFill>
+                  <a:srgbClr val="22282E"/>
+                </a:solidFill>
+              </a:rPr>
+              <a:t>•  No: CSRF ejecuta acciones; el CORS inseguro permite leer respuestas cross-origin, filtrando datos.</a:t>
+            </a:r>
+          </a:p>
+          <a:p>
+            <a:pPr>
+              <a:spcAft>
+                <a:spcPts val="600"/>
+              </a:spcAft>
+            </a:pPr>
+            <a:r>
+              <a:rPr sz="1500">
+                <a:solidFill>
+                  <a:srgbClr val="22282E"/>
+                </a:solidFill>
+              </a:rPr>
+              <a:t>•  ❓ ¿Prototype pollution siempre es explotable?</a:t>
+            </a:r>
+          </a:p>
+          <a:p>
+            <a:pPr>
+              <a:spcAft>
+                <a:spcPts val="600"/>
+              </a:spcAft>
+            </a:pPr>
+            <a:r>
+              <a:rPr sz="1500">
+                <a:solidFill>
+                  <a:srgbClr val="22282E"/>
+                </a:solidFill>
+              </a:rPr>
+              <a:t>•  No por sí sola; necesita un gadget que lea la propiedad contaminada. Sin gadget, es un fallo latente.</a:t>
+            </a:r>
+          </a:p>
+          <a:p>
+            <a:pPr>
+              <a:spcAft>
+                <a:spcPts val="600"/>
+              </a:spcAft>
+            </a:pPr>
+            <a:r>
+              <a:rPr sz="1500">
+                <a:solidFill>
+                  <a:srgbClr val="22282E"/>
+                </a:solidFill>
+              </a:rPr>
+              <a:t>•  ❓ ¿Por qué validar event.origin en postMessage?</a:t>
+            </a:r>
+          </a:p>
+          <a:p>
+            <a:pPr>
+              <a:spcAft>
+                <a:spcPts val="600"/>
+              </a:spcAft>
+            </a:pPr>
+            <a:r>
+              <a:rPr sz="1500">
+                <a:solidFill>
+                  <a:srgbClr val="22282E"/>
+                </a:solidFill>
+              </a:rPr>
+              <a:t>•  Porque sin ello cualquier página puede enviar mensajes maliciosos que tu handler procesa como confiables.</a:t>
+            </a:r>
+          </a:p>
+        </p:txBody>
+      </p:sp>
+    </p:spTree>
+  </p:cSld>
+  <p:clrMapOvr>
+    <a:masterClrMapping/>
+  </p:clrMapOvr>
+</p:sld>
+</file>
+
+<file path=ppt/slides/slide14.xml><?xml version="1.0" encoding="utf-8"?>
+<p:sld xmlns:a="http://schemas.openxmlformats.org/drawingml/2006/main" xmlns:p="http://schemas.openxmlformats.org/presentationml/2006/main" xmlns:r="http://schemas.openxmlformats.org/officeDocument/2006/relationships">
+  <p:cSld>
+    <p:spTree>
+      <p:nvGrpSpPr>
+        <p:cNvPr id="1" name=""/>
+        <p:cNvGrpSpPr/>
+        <p:nvPr/>
+      </p:nvGrpSpPr>
+      <p:grpSpPr/>
+      <p:sp>
+        <p:nvSpPr>
+          <p:cNvPr id="2" name="TextBox 1"/>
+          <p:cNvSpPr txBox="1"/>
+          <p:nvPr/>
+        </p:nvSpPr>
+        <p:spPr>
+          <a:xfrm>
+            <a:off x="457200" y="320040"/>
+            <a:ext cx="8229600" cy="822960"/>
+          </a:xfrm>
+          <a:prstGeom prst="rect">
+            <a:avLst/>
+          </a:prstGeom>
+          <a:noFill/>
+        </p:spPr>
+        <p:txBody>
+          <a:bodyPr wrap="square">
+            <a:spAutoFit/>
+          </a:bodyPr>
+          <a:lstStyle/>
+          <a:p>
+            <a:r>
+              <a:rPr sz="2600" b="1">
+                <a:solidFill>
+                  <a:srgbClr val="0B3D2E"/>
+                </a:solidFill>
+              </a:rPr>
+              <a:t>🔗 Referencias</a:t>
+            </a:r>
+          </a:p>
+        </p:txBody>
+      </p:sp>
+      <p:sp>
+        <p:nvSpPr>
+          <p:cNvPr id="3" name="TextBox 2"/>
+          <p:cNvSpPr txBox="1"/>
+          <p:nvPr/>
+        </p:nvSpPr>
+        <p:spPr>
+          <a:xfrm>
+            <a:off x="457200" y="1280160"/>
+            <a:ext cx="8229600" cy="4937760"/>
+          </a:xfrm>
+          <a:prstGeom prst="rect">
+            <a:avLst/>
+          </a:prstGeom>
+          <a:noFill/>
+        </p:spPr>
+        <p:txBody>
+          <a:bodyPr wrap="square">
+            <a:spAutoFit/>
+          </a:bodyPr>
+          <a:lstStyle/>
+          <a:p>
+            <a:pPr>
+              <a:spcAft>
+                <a:spcPts val="600"/>
+              </a:spcAft>
+            </a:pPr>
+            <a:r>
+              <a:rPr sz="1500">
+                <a:solidFill>
+                  <a:srgbClr val="22282E"/>
+                </a:solidFill>
+              </a:rPr>
               <a:t>•  PortSwigger — CORS: &lt;https://portswigger.net/web-security/cors&gt;</a:t>
             </a:r>
           </a:p>
@@ -3599,6 +3870,81 @@
           </a:p>
         </p:txBody>
       </p:sp>
+    </p:spTree>
+  </p:cSld>
+  <p:clrMapOvr>
+    <a:masterClrMapping/>
+  </p:clrMapOvr>
+</p:sld>
+</file>
+
+<file path=ppt/slides/slide15.xml><?xml version="1.0" encoding="utf-8"?>
+<p:sld xmlns:a="http://schemas.openxmlformats.org/drawingml/2006/main" xmlns:p="http://schemas.openxmlformats.org/presentationml/2006/main" xmlns:r="http://schemas.openxmlformats.org/officeDocument/2006/relationships">
+  <p:cSld>
+    <p:spTree>
+      <p:nvGrpSpPr>
+        <p:cNvPr id="1" name=""/>
+        <p:cNvGrpSpPr/>
+        <p:nvPr/>
+      </p:nvGrpSpPr>
+      <p:grpSpPr/>
+      <p:sp>
+        <p:nvSpPr>
+          <p:cNvPr id="2" name="TextBox 1"/>
+          <p:cNvSpPr txBox="1"/>
+          <p:nvPr/>
+        </p:nvSpPr>
+        <p:spPr>
+          <a:xfrm>
+            <a:off x="457200" y="274320"/>
+            <a:ext cx="8229600" cy="640080"/>
+          </a:xfrm>
+          <a:prstGeom prst="rect">
+            <a:avLst/>
+          </a:prstGeom>
+          <a:noFill/>
+        </p:spPr>
+        <p:txBody>
+          <a:bodyPr wrap="square">
+            <a:spAutoFit/>
+          </a:bodyPr>
+          <a:lstStyle/>
+          <a:p>
+            <a:r>
+              <a:rPr sz="2200" b="1">
+                <a:solidFill>
+                  <a:srgbClr val="0B3D2E"/>
+                </a:solidFill>
+              </a:rPr>
+              <a:t>Diagrama de la clase</a:t>
+            </a:r>
+          </a:p>
+        </p:txBody>
+      </p:sp>
+      <p:pic>
+        <p:nvPicPr>
+          <p:cNvPr id="3" name="Picture 2" descr="24bf42124c6ec707.png"/>
+          <p:cNvPicPr>
+            <a:picLocks noChangeAspect="1"/>
+          </p:cNvPicPr>
+          <p:nvPr/>
+        </p:nvPicPr>
+        <p:blipFill>
+          <a:blip r:embed="rId2"/>
+          <a:stretch>
+            <a:fillRect/>
+          </a:stretch>
+        </p:blipFill>
+        <p:spPr>
+          <a:xfrm>
+            <a:off x="457200" y="2031478"/>
+            <a:ext cx="8229600" cy="3435123"/>
+          </a:xfrm>
+          <a:prstGeom prst="rect">
+            <a:avLst/>
+          </a:prstGeom>
+        </p:spPr>
+      </p:pic>
     </p:spTree>
   </p:cSld>
   <p:clrMapOvr>
@@ -3683,7 +4029,7 @@
                   <a:srgbClr val="22282E"/>
                 </a:solidFill>
               </a:rPr>
-              <a:t>•  Explotar tres clases de ataques del lado del cliente propias de las aplicaciones JavaScript modernas: configuraciones CORS inseguras que exponen datos, uso inseguro de postMessage entre ventanas/iframes, y prototype pollution en JavaScript que puede escalar a XSS o RCE (en Node). Son vectores de moda en el bug bounty actual.</a:t>
+              <a:t>•  Explotar tres clases de ataques del lado del cliente propias de las aplicaciones JavaScript modernas: configuraciones CORS inseguras que exponen datos, uso inseguro de postMessage entre…</a:t>
             </a:r>
           </a:p>
         </p:txBody>
@@ -4077,7 +4423,7 @@
                   <a:srgbClr val="0B3D2E"/>
                 </a:solidFill>
               </a:rPr>
-              <a:t>📖 Definiciones y características</a:t>
+              <a:t>🧠 Explicación en profundidad</a:t>
             </a:r>
           </a:p>
         </p:txBody>
@@ -4115,82 +4461,97 @@
                   <a:srgbClr val="22282E"/>
                 </a:solidFill>
               </a:rPr>
-              <a:t>•  SOP (Same-Origin Policy): política que aísla orígenes distintos. Característica: CORS la relaja de forma controlada.</a:t>
-            </a:r>
-          </a:p>
-          <a:p>
-            <a:pPr>
-              <a:spcAft>
-                <a:spcPts val="600"/>
-              </a:spcAft>
-            </a:pPr>
-            <a:r>
-              <a:rPr sz="1500">
-                <a:solidFill>
-                  <a:srgbClr val="22282E"/>
-                </a:solidFill>
-              </a:rPr>
-              <a:t>•  CORS inseguro: reflejar el Origin o permitir null con Access-Control-Allow-Credentials: true. Característica: permite leer datos autenticados cross-origin.</a:t>
-            </a:r>
-          </a:p>
-          <a:p>
-            <a:pPr>
-              <a:spcAft>
-                <a:spcPts val="600"/>
-              </a:spcAft>
-            </a:pPr>
-            <a:r>
-              <a:rPr sz="1500">
-                <a:solidFill>
-                  <a:srgbClr val="22282E"/>
-                </a:solidFill>
-              </a:rPr>
-              <a:t>•  postMessage: API para comunicar ventanas/iframes. Característica: insegura si no se valida event.origin ni los datos.</a:t>
-            </a:r>
-          </a:p>
-          <a:p>
-            <a:pPr>
-              <a:spcAft>
-                <a:spcPts val="600"/>
-              </a:spcAft>
-            </a:pPr>
-            <a:r>
-              <a:rPr sz="1500">
-                <a:solidFill>
-                  <a:srgbClr val="22282E"/>
-                </a:solidFill>
-              </a:rPr>
-              <a:t>•  Prototype pollution: inyectar propiedades en Object.prototype vía claves como proto. Característica: afecta a todos los objetos.</a:t>
-            </a:r>
-          </a:p>
-          <a:p>
-            <a:pPr>
-              <a:spcAft>
-                <a:spcPts val="600"/>
-              </a:spcAft>
-            </a:pPr>
-            <a:r>
-              <a:rPr sz="1500">
-                <a:solidFill>
-                  <a:srgbClr val="22282E"/>
-                </a:solidFill>
-              </a:rPr>
-              <a:t>•  Gadget: código que lee una propiedad contaminable y la usa peligrosamente. Característica: convierte la contaminación en XSS/RCE.</a:t>
-            </a:r>
-          </a:p>
-          <a:p>
-            <a:pPr>
-              <a:spcAft>
-                <a:spcPts val="600"/>
-              </a:spcAft>
-            </a:pPr>
-            <a:r>
-              <a:rPr sz="1500">
-                <a:solidFill>
-                  <a:srgbClr val="22282E"/>
-                </a:solidFill>
-              </a:rPr>
-              <a:t>•  Source/sink en cliente: origen del dato y punto de uso. Característica: base para rastrear estos ataques.</a:t>
+              <a:t>•  El navegador aísla los sitios entre sí con la política del mismo origen (SOP): el JavaScript de</a:t>
+            </a:r>
+          </a:p>
+          <a:p>
+            <a:pPr>
+              <a:spcAft>
+                <a:spcPts val="600"/>
+              </a:spcAft>
+            </a:pPr>
+            <a:r>
+              <a:rPr sz="1500">
+                <a:solidFill>
+                  <a:srgbClr val="22282E"/>
+                </a:solidFill>
+              </a:rPr>
+              <a:t>•  a.com no puede leer datos de b.com. Es la barrera fundamental de la seguridad web del lado del</a:t>
+            </a:r>
+          </a:p>
+          <a:p>
+            <a:pPr>
+              <a:spcAft>
+                <a:spcPts val="600"/>
+              </a:spcAft>
+            </a:pPr>
+            <a:r>
+              <a:rPr sz="1500">
+                <a:solidFill>
+                  <a:srgbClr val="22282E"/>
+                </a:solidFill>
+              </a:rPr>
+              <a:t>•  cliente, y esta clase reúne tres formas de relajarla mal o rodearla: CORS mal configurado,</a:t>
+            </a:r>
+          </a:p>
+          <a:p>
+            <a:pPr>
+              <a:spcAft>
+                <a:spcPts val="600"/>
+              </a:spcAft>
+            </a:pPr>
+            <a:r>
+              <a:rPr sz="1500">
+                <a:solidFill>
+                  <a:srgbClr val="22282E"/>
+                </a:solidFill>
+              </a:rPr>
+              <a:t>•  postMessage inseguro y prototype pollution. Los tres comparten que el fallo está en el cliente</a:t>
+            </a:r>
+          </a:p>
+          <a:p>
+            <a:pPr>
+              <a:spcAft>
+                <a:spcPts val="600"/>
+              </a:spcAft>
+            </a:pPr>
+            <a:r>
+              <a:rPr sz="1500">
+                <a:solidFill>
+                  <a:srgbClr val="22282E"/>
+                </a:solidFill>
+              </a:rPr>
+              <a:t>•  —en cómo el JavaScript de la aplicación maneja la comunicación entre orígenes o su propio estado— y que</a:t>
+            </a:r>
+          </a:p>
+          <a:p>
+            <a:pPr>
+              <a:spcAft>
+                <a:spcPts val="600"/>
+              </a:spcAft>
+            </a:pPr>
+            <a:r>
+              <a:rPr sz="1500">
+                <a:solidFill>
+                  <a:srgbClr val="22282E"/>
+                </a:solidFill>
+              </a:rPr>
+              <a:t>•  su impacto va del robo de datos al XSS o incluso al RCE.</a:t>
+            </a:r>
+          </a:p>
+          <a:p>
+            <a:pPr>
+              <a:spcAft>
+                <a:spcPts val="600"/>
+              </a:spcAft>
+            </a:pPr>
+            <a:r>
+              <a:rPr sz="1500">
+                <a:solidFill>
+                  <a:srgbClr val="22282E"/>
+                </a:solidFill>
+              </a:rPr>
+              <a:t>•  CORS (Cross-Origin Resource Sharing) es el mecanismo que permite, de forma controlada, que un</a:t>
             </a:r>
           </a:p>
         </p:txBody>
@@ -4241,7 +4602,7 @@
                   <a:srgbClr val="0B3D2E"/>
                 </a:solidFill>
               </a:rPr>
-              <a:t>🧰 Herramientas y preparación</a:t>
+              <a:t>📖 Definiciones y características</a:t>
             </a:r>
           </a:p>
         </p:txBody>
@@ -4279,37 +4640,82 @@
                   <a:srgbClr val="22282E"/>
                 </a:solidFill>
               </a:rPr>
-              <a:t>•  PortSwigger labs de CORS, DOM-based y prototype pollution.</a:t>
-            </a:r>
-          </a:p>
-          <a:p>
-            <a:pPr>
-              <a:spcAft>
-                <a:spcPts val="600"/>
-              </a:spcAft>
-            </a:pPr>
-            <a:r>
-              <a:rPr sz="1500">
-                <a:solidFill>
-                  <a:srgbClr val="22282E"/>
-                </a:solidFill>
-              </a:rPr>
-              <a:t>•  Burp con DOM Invader (detecta postMessage y prototype pollution).</a:t>
-            </a:r>
-          </a:p>
-          <a:p>
-            <a:pPr>
-              <a:spcAft>
-                <a:spcPts val="600"/>
-              </a:spcAft>
-            </a:pPr>
-            <a:r>
-              <a:rPr sz="1500">
-                <a:solidFill>
-                  <a:srgbClr val="22282E"/>
-                </a:solidFill>
-              </a:rPr>
-              <a:t>•  Un servidor propio para alojar la página de exploit cross-origin.</a:t>
+              <a:t>•  SOP (Same-Origin Policy): política que aísla orígenes distintos. Característica: CORS la relaja de forma controlada.</a:t>
+            </a:r>
+          </a:p>
+          <a:p>
+            <a:pPr>
+              <a:spcAft>
+                <a:spcPts val="600"/>
+              </a:spcAft>
+            </a:pPr>
+            <a:r>
+              <a:rPr sz="1500">
+                <a:solidFill>
+                  <a:srgbClr val="22282E"/>
+                </a:solidFill>
+              </a:rPr>
+              <a:t>•  CORS inseguro: reflejar el Origin o permitir null con Access-Control-Allow-Credentials: true. Característica: permite leer datos autenticados cross-origin.</a:t>
+            </a:r>
+          </a:p>
+          <a:p>
+            <a:pPr>
+              <a:spcAft>
+                <a:spcPts val="600"/>
+              </a:spcAft>
+            </a:pPr>
+            <a:r>
+              <a:rPr sz="1500">
+                <a:solidFill>
+                  <a:srgbClr val="22282E"/>
+                </a:solidFill>
+              </a:rPr>
+              <a:t>•  postMessage: API para comunicar ventanas/iframes. Característica: insegura si no se valida event.origin ni los datos.</a:t>
+            </a:r>
+          </a:p>
+          <a:p>
+            <a:pPr>
+              <a:spcAft>
+                <a:spcPts val="600"/>
+              </a:spcAft>
+            </a:pPr>
+            <a:r>
+              <a:rPr sz="1500">
+                <a:solidFill>
+                  <a:srgbClr val="22282E"/>
+                </a:solidFill>
+              </a:rPr>
+              <a:t>•  Prototype pollution: inyectar propiedades en Object.prototype vía claves como proto. Característica: afecta a todos los objetos.</a:t>
+            </a:r>
+          </a:p>
+          <a:p>
+            <a:pPr>
+              <a:spcAft>
+                <a:spcPts val="600"/>
+              </a:spcAft>
+            </a:pPr>
+            <a:r>
+              <a:rPr sz="1500">
+                <a:solidFill>
+                  <a:srgbClr val="22282E"/>
+                </a:solidFill>
+              </a:rPr>
+              <a:t>•  Gadget: código que lee una propiedad contaminable y la usa peligrosamente. Característica: convierte la contaminación en XSS/RCE.</a:t>
+            </a:r>
+          </a:p>
+          <a:p>
+            <a:pPr>
+              <a:spcAft>
+                <a:spcPts val="600"/>
+              </a:spcAft>
+            </a:pPr>
+            <a:r>
+              <a:rPr sz="1500">
+                <a:solidFill>
+                  <a:srgbClr val="22282E"/>
+                </a:solidFill>
+              </a:rPr>
+              <a:t>•  Source/sink en cliente: origen del dato y punto de uso. Característica: base para rastrear estos ataques.</a:t>
             </a:r>
           </a:p>
         </p:txBody>
@@ -4360,7 +4766,7 @@
                   <a:srgbClr val="0B3D2E"/>
                 </a:solidFill>
               </a:rPr>
-              <a:t>🧪 Laboratorio guiado</a:t>
+              <a:t>📔 Glosario</a:t>
             </a:r>
           </a:p>
         </p:txBody>
@@ -4398,97 +4804,97 @@
                   <a:srgbClr val="22282E"/>
                 </a:solidFill>
               </a:rPr>
-              <a:t>•  CORS: envía una petición con Origin: https://evil.com y observa si se refleja en Access-Control-Allow-Origin junto a Allow-Credentials: true.</a:t>
-            </a:r>
-          </a:p>
-          <a:p>
-            <a:pPr>
-              <a:spcAft>
-                <a:spcPts val="600"/>
-              </a:spcAft>
-            </a:pPr>
-            <a:r>
-              <a:rPr sz="1500">
-                <a:solidFill>
-                  <a:srgbClr val="22282E"/>
-                </a:solidFill>
-              </a:rPr>
-              <a:t>•  Aloja un exploit que use fetch con credentials: 'include' para leer datos sensibles cross-origin.</a:t>
-            </a:r>
-          </a:p>
-          <a:p>
-            <a:pPr>
-              <a:spcAft>
-                <a:spcPts val="600"/>
-              </a:spcAft>
-            </a:pPr>
-            <a:r>
-              <a:rPr sz="1500">
-                <a:solidFill>
-                  <a:srgbClr val="22282E"/>
-                </a:solidFill>
-              </a:rPr>
-              <a:t>•  Prueba también el origen null (iframe sandbox) si el servidor lo acepta.</a:t>
-            </a:r>
-          </a:p>
-          <a:p>
-            <a:pPr>
-              <a:spcAft>
-                <a:spcPts val="600"/>
-              </a:spcAft>
-            </a:pPr>
-            <a:r>
-              <a:rPr sz="1500">
-                <a:solidFill>
-                  <a:srgbClr val="22282E"/>
-                </a:solidFill>
-              </a:rPr>
-              <a:t>•  postMessage: con DOM Invader, localiza un handler que use event.data sin validar event.origin.</a:t>
-            </a:r>
-          </a:p>
-          <a:p>
-            <a:pPr>
-              <a:spcAft>
-                <a:spcPts val="600"/>
-              </a:spcAft>
-            </a:pPr>
-            <a:r>
-              <a:rPr sz="1500">
-                <a:solidFill>
-                  <a:srgbClr val="22282E"/>
-                </a:solidFill>
-              </a:rPr>
-              <a:t>•  Envía un mensaje desde tu página para inyectar en un sink (p. ej. innerHTML) y lograr XSS.</a:t>
-            </a:r>
-          </a:p>
-          <a:p>
-            <a:pPr>
-              <a:spcAft>
-                <a:spcPts val="600"/>
-              </a:spcAft>
-            </a:pPr>
-            <a:r>
-              <a:rPr sz="1500">
-                <a:solidFill>
-                  <a:srgbClr val="22282E"/>
-                </a:solidFill>
-              </a:rPr>
-              <a:t>•  Prototype pollution: identifica un source (parámetro JSON/URL) que permita proto[x]=y y un gadget que lo consuma.</a:t>
-            </a:r>
-          </a:p>
-          <a:p>
-            <a:pPr>
-              <a:spcAft>
-                <a:spcPts val="600"/>
-              </a:spcAft>
-            </a:pPr>
-            <a:r>
-              <a:rPr sz="1500">
-                <a:solidFill>
-                  <a:srgbClr val="22282E"/>
-                </a:solidFill>
-              </a:rPr>
-              <a:t>•  Encadena la contaminación hasta ejecutar JavaScript en el lab. Documenta cada vector.</a:t>
+              <a:t>•  Término — Definición concisa</a:t>
+            </a:r>
+          </a:p>
+          <a:p>
+            <a:pPr>
+              <a:spcAft>
+                <a:spcPts val="600"/>
+              </a:spcAft>
+            </a:pPr>
+            <a:r>
+              <a:rPr sz="1500">
+                <a:solidFill>
+                  <a:srgbClr val="22282E"/>
+                </a:solidFill>
+              </a:rPr>
+              <a:t>•  Same-Origin Policy (SOP) — Aísla el JS de un origen de los datos de otro</a:t>
+            </a:r>
+          </a:p>
+          <a:p>
+            <a:pPr>
+              <a:spcAft>
+                <a:spcPts val="600"/>
+              </a:spcAft>
+            </a:pPr>
+            <a:r>
+              <a:rPr sz="1500">
+                <a:solidFill>
+                  <a:srgbClr val="22282E"/>
+                </a:solidFill>
+              </a:rPr>
+              <a:t>•  CORS — Mecanismo que relaja la SOP de forma controlada</a:t>
+            </a:r>
+          </a:p>
+          <a:p>
+            <a:pPr>
+              <a:spcAft>
+                <a:spcPts val="600"/>
+              </a:spcAft>
+            </a:pPr>
+            <a:r>
+              <a:rPr sz="1500">
+                <a:solidFill>
+                  <a:srgbClr val="22282E"/>
+                </a:solidFill>
+              </a:rPr>
+              <a:t>•  Access-Control-Allow-Origin — Cabecera que dice qué orígenes pueden leer la respuesta</a:t>
+            </a:r>
+          </a:p>
+          <a:p>
+            <a:pPr>
+              <a:spcAft>
+                <a:spcPts val="600"/>
+              </a:spcAft>
+            </a:pPr>
+            <a:r>
+              <a:rPr sz="1500">
+                <a:solidFill>
+                  <a:srgbClr val="22282E"/>
+                </a:solidFill>
+              </a:rPr>
+              <a:t>•  Reflejar el Origin — Fallo: devolver el Origin recibido con credenciales</a:t>
+            </a:r>
+          </a:p>
+          <a:p>
+            <a:pPr>
+              <a:spcAft>
+                <a:spcPts val="600"/>
+              </a:spcAft>
+            </a:pPr>
+            <a:r>
+              <a:rPr sz="1500">
+                <a:solidFill>
+                  <a:srgbClr val="22282E"/>
+                </a:solidFill>
+              </a:rPr>
+              <a:t>•  Allow-Credentials — Permite enviar cookies en la petición cross-origin</a:t>
+            </a:r>
+          </a:p>
+          <a:p>
+            <a:pPr>
+              <a:spcAft>
+                <a:spcPts val="600"/>
+              </a:spcAft>
+            </a:pPr>
+            <a:r>
+              <a:rPr sz="1500">
+                <a:solidFill>
+                  <a:srgbClr val="22282E"/>
+                </a:solidFill>
+              </a:rPr>
+              <a:t>•  Origen null — Valor que ciertos contextos envían; peligroso confiarlo</a:t>
             </a:r>
           </a:p>
         </p:txBody>
@@ -4539,7 +4945,7 @@
                   <a:srgbClr val="0B3D2E"/>
                 </a:solidFill>
               </a:rPr>
-              <a:t>✍️ Ejercicios</a:t>
+              <a:t>🧰 Herramientas y preparación</a:t>
             </a:r>
           </a:p>
         </p:txBody>
@@ -4577,82 +4983,37 @@
                   <a:srgbClr val="22282E"/>
                 </a:solidFill>
               </a:rPr>
-              <a:t>•  Explota un CORS que refleja el Origin y roba datos autenticados en el lab.</a:t>
-            </a:r>
-          </a:p>
-          <a:p>
-            <a:pPr>
-              <a:spcAft>
-                <a:spcPts val="600"/>
-              </a:spcAft>
-            </a:pPr>
-            <a:r>
-              <a:rPr sz="1500">
-                <a:solidFill>
-                  <a:srgbClr val="22282E"/>
-                </a:solidFill>
-              </a:rPr>
-              <a:t>•  Encuentra un postMessage sin validación de origen y explótalo.</a:t>
-            </a:r>
-          </a:p>
-          <a:p>
-            <a:pPr>
-              <a:spcAft>
-                <a:spcPts val="600"/>
-              </a:spcAft>
-            </a:pPr>
-            <a:r>
-              <a:rPr sz="1500">
-                <a:solidFill>
-                  <a:srgbClr val="22282E"/>
-                </a:solidFill>
-              </a:rPr>
-              <a:t>•  Contamina Object.prototype desde un parámetro y comprueba el efecto global.</a:t>
-            </a:r>
-          </a:p>
-          <a:p>
-            <a:pPr>
-              <a:spcAft>
-                <a:spcPts val="600"/>
-              </a:spcAft>
-            </a:pPr>
-            <a:r>
-              <a:rPr sz="1500">
-                <a:solidFill>
-                  <a:srgbClr val="22282E"/>
-                </a:solidFill>
-              </a:rPr>
-              <a:t>•  Localiza un gadget que convierta la contaminación en XSS.</a:t>
-            </a:r>
-          </a:p>
-          <a:p>
-            <a:pPr>
-              <a:spcAft>
-                <a:spcPts val="600"/>
-              </a:spcAft>
-            </a:pPr>
-            <a:r>
-              <a:rPr sz="1500">
-                <a:solidFill>
-                  <a:srgbClr val="22282E"/>
-                </a:solidFill>
-              </a:rPr>
-              <a:t>•  Explica el riesgo de prototype pollution en Node (RCE) frente al cliente (XSS).</a:t>
-            </a:r>
-          </a:p>
-          <a:p>
-            <a:pPr>
-              <a:spcAft>
-                <a:spcPts val="600"/>
-              </a:spcAft>
-            </a:pPr>
-            <a:r>
-              <a:rPr sz="1500">
-                <a:solidFill>
-                  <a:srgbClr val="22282E"/>
-                </a:solidFill>
-              </a:rPr>
-              <a:t>•  Propón defensas: allowlist de orígenes, validar event.origin, Object.freeze(Object.prototype).</a:t>
+              <a:t>•  PortSwigger labs de CORS, DOM-based y prototype pollution.</a:t>
+            </a:r>
+          </a:p>
+          <a:p>
+            <a:pPr>
+              <a:spcAft>
+                <a:spcPts val="600"/>
+              </a:spcAft>
+            </a:pPr>
+            <a:r>
+              <a:rPr sz="1500">
+                <a:solidFill>
+                  <a:srgbClr val="22282E"/>
+                </a:solidFill>
+              </a:rPr>
+              <a:t>•  Burp con DOM Invader (detecta postMessage y prototype pollution).</a:t>
+            </a:r>
+          </a:p>
+          <a:p>
+            <a:pPr>
+              <a:spcAft>
+                <a:spcPts val="600"/>
+              </a:spcAft>
+            </a:pPr>
+            <a:r>
+              <a:rPr sz="1500">
+                <a:solidFill>
+                  <a:srgbClr val="22282E"/>
+                </a:solidFill>
+              </a:rPr>
+              <a:t>•  Un servidor propio para alojar la página de exploit cross-origin.</a:t>
             </a:r>
           </a:p>
         </p:txBody>
@@ -4703,7 +5064,7 @@
                   <a:srgbClr val="0B3D2E"/>
                 </a:solidFill>
               </a:rPr>
-              <a:t>📝 Reto verificable</a:t>
+              <a:t>🧪 Laboratorio guiado</a:t>
             </a:r>
           </a:p>
         </p:txBody>
@@ -4741,22 +5102,97 @@
                   <a:srgbClr val="22282E"/>
                 </a:solidFill>
               </a:rPr>
-              <a:t>•  Resuelve un lab de CORS que permita exfiltrar datos autenticados y un lab de prototype pollution que escale a XSS, documentando ambos.</a:t>
-            </a:r>
-          </a:p>
-          <a:p>
-            <a:pPr>
-              <a:spcAft>
-                <a:spcPts val="600"/>
-              </a:spcAft>
-            </a:pPr>
-            <a:r>
-              <a:rPr sz="1500">
-                <a:solidFill>
-                  <a:srgbClr val="22282E"/>
-                </a:solidFill>
-              </a:rPr>
-              <a:t>•  Criterio de aceptación: ambos labs quedan resueltos, entregas el exploit CORS (con credentials), el source→gadget de la contaminación y las defensas concretas por vector.</a:t>
+              <a:t>•  CORS: envía una petición con Origin: https://evil.com y observa si se refleja en Access-Control-Allow-Origin junto a Allow-Credentials: true.</a:t>
+            </a:r>
+          </a:p>
+          <a:p>
+            <a:pPr>
+              <a:spcAft>
+                <a:spcPts val="600"/>
+              </a:spcAft>
+            </a:pPr>
+            <a:r>
+              <a:rPr sz="1500">
+                <a:solidFill>
+                  <a:srgbClr val="22282E"/>
+                </a:solidFill>
+              </a:rPr>
+              <a:t>•  Aloja un exploit que use fetch con credentials: 'include' para leer datos sensibles cross-origin.</a:t>
+            </a:r>
+          </a:p>
+          <a:p>
+            <a:pPr>
+              <a:spcAft>
+                <a:spcPts val="600"/>
+              </a:spcAft>
+            </a:pPr>
+            <a:r>
+              <a:rPr sz="1500">
+                <a:solidFill>
+                  <a:srgbClr val="22282E"/>
+                </a:solidFill>
+              </a:rPr>
+              <a:t>•  Prueba también el origen null (iframe sandbox) si el servidor lo acepta.</a:t>
+            </a:r>
+          </a:p>
+          <a:p>
+            <a:pPr>
+              <a:spcAft>
+                <a:spcPts val="600"/>
+              </a:spcAft>
+            </a:pPr>
+            <a:r>
+              <a:rPr sz="1500">
+                <a:solidFill>
+                  <a:srgbClr val="22282E"/>
+                </a:solidFill>
+              </a:rPr>
+              <a:t>•  postMessage: con DOM Invader, localiza un handler que use event.data sin validar event.origin.</a:t>
+            </a:r>
+          </a:p>
+          <a:p>
+            <a:pPr>
+              <a:spcAft>
+                <a:spcPts val="600"/>
+              </a:spcAft>
+            </a:pPr>
+            <a:r>
+              <a:rPr sz="1500">
+                <a:solidFill>
+                  <a:srgbClr val="22282E"/>
+                </a:solidFill>
+              </a:rPr>
+              <a:t>•  Envía un mensaje desde tu página para inyectar en un sink (p. ej. innerHTML) y lograr XSS.</a:t>
+            </a:r>
+          </a:p>
+          <a:p>
+            <a:pPr>
+              <a:spcAft>
+                <a:spcPts val="600"/>
+              </a:spcAft>
+            </a:pPr>
+            <a:r>
+              <a:rPr sz="1500">
+                <a:solidFill>
+                  <a:srgbClr val="22282E"/>
+                </a:solidFill>
+              </a:rPr>
+              <a:t>•  Prototype pollution: identifica un source (parámetro JSON/URL) que permita proto[x]=y y un gadget que lo consuma.</a:t>
+            </a:r>
+          </a:p>
+          <a:p>
+            <a:pPr>
+              <a:spcAft>
+                <a:spcPts val="600"/>
+              </a:spcAft>
+            </a:pPr>
+            <a:r>
+              <a:rPr sz="1500">
+                <a:solidFill>
+                  <a:srgbClr val="22282E"/>
+                </a:solidFill>
+              </a:rPr>
+              <a:t>•  Encadena la contaminación hasta ejecutar JavaScript en el lab. Documenta cada vector.</a:t>
             </a:r>
           </a:p>
         </p:txBody>
